--- a/zajecia/robo/robo_w5.pptx
+++ b/zajecia/robo/robo_w5.pptx
@@ -3188,14 +3188,21 @@
             <a:avLst/>
           </a:prstGeom>
           <a:solidFill>
-            <a:srgbClr val="1A3550"/>
+            <a:schemeClr val="bg1"/>
           </a:solidFill>
-          <a:ln w="38100">
+          <a:ln w="76200">
             <a:solidFill>
               <a:srgbClr val="A855F7"/>
             </a:solidFill>
             <a:prstDash val="solid"/>
           </a:ln>
+          <a:effectLst>
+            <a:outerShdw blurRad="50800" dist="38100" dir="2700000" algn="tl" rotWithShape="0">
+              <a:prstClr val="black">
+                <a:alpha val="40000"/>
+              </a:prstClr>
+            </a:outerShdw>
+          </a:effectLst>
         </p:spPr>
       </p:sp>
       <p:pic>
@@ -3214,8 +3221,8 @@
         </p:blipFill>
         <p:spPr>
           <a:xfrm>
-            <a:off x="6720840" y="1143000"/>
-            <a:ext cx="1645920" cy="1645920"/>
+            <a:off x="6812280" y="1234440"/>
+            <a:ext cx="1463040" cy="1463040"/>
           </a:xfrm>
           <a:prstGeom prst="rect">
             <a:avLst/>
@@ -3300,7 +3307,7 @@
               <a:buNone/>
             </a:pPr>
             <a:r>
-              <a:rPr lang="en-US" sz="3800" b="1" dirty="0">
+              <a:rPr lang="en-US" sz="4400" b="1" dirty="0">
                 <a:solidFill>
                   <a:srgbClr val="FFFFFF"/>
                 </a:solidFill>
@@ -3310,7 +3317,7 @@
               </a:rPr>
               <a:t>WYKŁAD 5</a:t>
             </a:r>
-            <a:endParaRPr lang="en-US" sz="3800" dirty="0"/>
+            <a:endParaRPr lang="en-US" sz="4400" dirty="0"/>
           </a:p>
         </p:txBody>
       </p:sp>
@@ -3394,7 +3401,7 @@
         </p:nvSpPr>
         <p:spPr>
           <a:xfrm>
-            <a:off x="320040" y="2971800"/>
+            <a:off x="320040" y="2889250"/>
             <a:ext cx="5760720" cy="365760"/>
           </a:xfrm>
           <a:prstGeom prst="rect">
@@ -4087,12 +4094,30 @@
                 </a:solidFill>
                 <a:latin typeface="Consolas" panose="020B0609020204030204" pitchFamily="49" charset="0"/>
               </a:rPr>
-              <a:t> base64, </a:t>
+              <a:t> </a:t>
+            </a:r>
+            <a:r>
+              <a:rPr lang="pl-PL" sz="1050" dirty="0">
+                <a:solidFill>
+                  <a:srgbClr val="4EC9B0"/>
+                </a:solidFill>
+                <a:latin typeface="Consolas" panose="020B0609020204030204" pitchFamily="49" charset="0"/>
+              </a:rPr>
+              <a:t>base64</a:t>
+            </a:r>
+            <a:r>
+              <a:rPr lang="pl-PL" sz="1050" dirty="0">
+                <a:solidFill>
+                  <a:srgbClr val="CCCCCC"/>
+                </a:solidFill>
+                <a:latin typeface="Consolas" panose="020B0609020204030204" pitchFamily="49" charset="0"/>
+              </a:rPr>
+              <a:t>, </a:t>
             </a:r>
             <a:r>
               <a:rPr lang="pl-PL" sz="1050" dirty="0" err="1">
                 <a:solidFill>
-                  <a:srgbClr val="CCCCCC"/>
+                  <a:srgbClr val="4EC9B0"/>
                 </a:solidFill>
                 <a:latin typeface="Consolas" panose="020B0609020204030204" pitchFamily="49" charset="0"/>
               </a:rPr>
@@ -4110,7 +4135,7 @@
             <a:r>
               <a:rPr lang="pl-PL" sz="1050" dirty="0" err="1">
                 <a:solidFill>
-                  <a:srgbClr val="CCCCCC"/>
+                  <a:srgbClr val="4EC9B0"/>
                 </a:solidFill>
                 <a:latin typeface="Consolas" panose="020B0609020204030204" pitchFamily="49" charset="0"/>
               </a:rPr>
@@ -5942,9 +5967,9 @@
             <a:avLst/>
           </a:prstGeom>
           <a:solidFill>
-            <a:srgbClr val="0D1B2A"/>
+            <a:schemeClr val="bg1"/>
           </a:solidFill>
-          <a:ln w="25400">
+          <a:ln w="57150">
             <a:solidFill>
               <a:srgbClr val="7C3AED"/>
             </a:solidFill>
@@ -6079,7 +6104,7 @@
               <a:buNone/>
             </a:pPr>
             <a:r>
-              <a:rPr lang="en-US" sz="2600" b="1" dirty="0">
+              <a:rPr lang="en-US" sz="2400" b="1" dirty="0">
                 <a:solidFill>
                   <a:srgbClr val="FFFFFF"/>
                 </a:solidFill>
@@ -6089,7 +6114,7 @@
               </a:rPr>
               <a:t>wizyjno-językowe-akcyjne</a:t>
             </a:r>
-            <a:endParaRPr lang="en-US" sz="2600" dirty="0"/>
+            <a:endParaRPr lang="en-US" sz="2400" dirty="0"/>
           </a:p>
         </p:txBody>
       </p:sp>
@@ -6371,7 +6396,7 @@
         <p:spPr>
           <a:xfrm>
             <a:off x="274320" y="1097280"/>
-            <a:ext cx="8595360" cy="3749040"/>
+            <a:ext cx="8595360" cy="2604770"/>
           </a:xfrm>
           <a:prstGeom prst="rect">
             <a:avLst/>
@@ -6402,8 +6427,8 @@
         </p:nvSpPr>
         <p:spPr>
           <a:xfrm>
-            <a:off x="457200" y="1188720"/>
-            <a:ext cx="8229600" cy="3520440"/>
+            <a:off x="311150" y="1188720"/>
+            <a:ext cx="8412480" cy="2513330"/>
           </a:xfrm>
           <a:prstGeom prst="rect">
             <a:avLst/>
@@ -6423,6 +6448,17 @@
               <a:buChar char="•"/>
             </a:pPr>
             <a:r>
+              <a:rPr lang="en-US" sz="1450" b="1" dirty="0">
+                <a:solidFill>
+                  <a:srgbClr val="0D1B2A"/>
+                </a:solidFill>
+                <a:latin typeface="Calibri" pitchFamily="34" charset="0"/>
+                <a:ea typeface="Calibri" pitchFamily="34" charset="-122"/>
+                <a:cs typeface="Calibri" pitchFamily="34" charset="-120"/>
+              </a:rPr>
+              <a:t>VLA rozszerza VLM o głowicę akcji </a:t>
+            </a:r>
+            <a:r>
               <a:rPr lang="en-US" sz="1450" dirty="0">
                 <a:solidFill>
                   <a:srgbClr val="0D1B2A"/>
@@ -6431,7 +6467,7 @@
                 <a:ea typeface="Calibri" pitchFamily="34" charset="-122"/>
                 <a:cs typeface="Calibri" pitchFamily="34" charset="-120"/>
               </a:rPr>
-              <a:t>VLA rozszerza VLM o głowicę akcji (action head): model generuje nie tylko tekst, lecz tokeny ruchu</a:t>
+              <a:t>(action head): model generuje nie tylko tekst, lecz tokeny ruchu</a:t>
             </a:r>
             <a:endParaRPr lang="en-US" sz="1450" dirty="0"/>
           </a:p>
@@ -6444,6 +6480,17 @@
               <a:buChar char="•"/>
             </a:pPr>
             <a:r>
+              <a:rPr lang="en-US" sz="1450" b="1" dirty="0">
+                <a:solidFill>
+                  <a:srgbClr val="0D1B2A"/>
+                </a:solidFill>
+                <a:latin typeface="Calibri" pitchFamily="34" charset="0"/>
+                <a:ea typeface="Calibri" pitchFamily="34" charset="-122"/>
+                <a:cs typeface="Calibri" pitchFamily="34" charset="-120"/>
+              </a:rPr>
+              <a:t>Wejście</a:t>
+            </a:r>
+            <a:r>
               <a:rPr lang="en-US" sz="1450" dirty="0">
                 <a:solidFill>
                   <a:srgbClr val="0D1B2A"/>
@@ -6452,7 +6499,29 @@
                 <a:ea typeface="Calibri" pitchFamily="34" charset="-122"/>
                 <a:cs typeface="Calibri" pitchFamily="34" charset="-120"/>
               </a:rPr>
-              <a:t>Wejście: obraz (lub sekwencja klatek) + polecenie językowe; wyjście: wektor akcji lub tokeny dyskretne</a:t>
+              <a:t>: obraz (lub sekwencja klatek) + polecenie językowe; </a:t>
+            </a:r>
+            <a:r>
+              <a:rPr lang="en-US" sz="1450" b="1" dirty="0" err="1" smtClean="0">
+                <a:solidFill>
+                  <a:srgbClr val="0D1B2A"/>
+                </a:solidFill>
+                <a:latin typeface="Calibri" pitchFamily="34" charset="0"/>
+                <a:ea typeface="Calibri" pitchFamily="34" charset="-122"/>
+                <a:cs typeface="Calibri" pitchFamily="34" charset="-120"/>
+              </a:rPr>
+              <a:t>wyjście</a:t>
+            </a:r>
+            <a:r>
+              <a:rPr lang="en-US" sz="1450" dirty="0">
+                <a:solidFill>
+                  <a:srgbClr val="0D1B2A"/>
+                </a:solidFill>
+                <a:latin typeface="Calibri" pitchFamily="34" charset="0"/>
+                <a:ea typeface="Calibri" pitchFamily="34" charset="-122"/>
+                <a:cs typeface="Calibri" pitchFamily="34" charset="-120"/>
+              </a:rPr>
+              <a:t>: wektor akcji lub tokeny dyskretne</a:t>
             </a:r>
             <a:endParaRPr lang="en-US" sz="1450" dirty="0"/>
           </a:p>
@@ -6465,6 +6534,17 @@
               <a:buChar char="•"/>
             </a:pPr>
             <a:r>
+              <a:rPr lang="en-US" sz="1450" b="1" dirty="0">
+                <a:solidFill>
+                  <a:srgbClr val="0D1B2A"/>
+                </a:solidFill>
+                <a:latin typeface="Calibri" pitchFamily="34" charset="0"/>
+                <a:ea typeface="Calibri" pitchFamily="34" charset="-122"/>
+                <a:cs typeface="Calibri" pitchFamily="34" charset="-120"/>
+              </a:rPr>
+              <a:t>RT-2 (Google DeepMind, 2023): </a:t>
+            </a:r>
+            <a:r>
               <a:rPr lang="en-US" sz="1450" dirty="0">
                 <a:solidFill>
                   <a:srgbClr val="0D1B2A"/>
@@ -6473,7 +6553,7 @@
                 <a:ea typeface="Calibri" pitchFamily="34" charset="-122"/>
                 <a:cs typeface="Calibri" pitchFamily="34" charset="-120"/>
               </a:rPr>
-              <a:t>RT-2 (Google DeepMind, 2023): fine-tuning PaLI-X (55B) i PaLM-E na danych robotycznych</a:t>
+              <a:t>fine-tuning PaLI-X (55B) i PaLM-E na danych robotycznych</a:t>
             </a:r>
             <a:endParaRPr lang="en-US" sz="1450" dirty="0"/>
           </a:p>
@@ -6486,6 +6566,17 @@
               <a:buChar char="•"/>
             </a:pPr>
             <a:r>
+              <a:rPr lang="en-US" sz="1450" b="1" dirty="0">
+                <a:solidFill>
+                  <a:srgbClr val="0D1B2A"/>
+                </a:solidFill>
+                <a:latin typeface="Calibri" pitchFamily="34" charset="0"/>
+                <a:ea typeface="Calibri" pitchFamily="34" charset="-122"/>
+                <a:cs typeface="Calibri" pitchFamily="34" charset="-120"/>
+              </a:rPr>
+              <a:t>OpenVLA (Stanford, 2024): </a:t>
+            </a:r>
+            <a:r>
               <a:rPr lang="en-US" sz="1450" dirty="0">
                 <a:solidFill>
                   <a:srgbClr val="0D1B2A"/>
@@ -6494,7 +6585,7 @@
                 <a:ea typeface="Calibri" pitchFamily="34" charset="-122"/>
                 <a:cs typeface="Calibri" pitchFamily="34" charset="-120"/>
               </a:rPr>
-              <a:t>OpenVLA (Stanford, 2024): open-source; Prismatic VLM + 7B LLaMA; tokeny akcji jako tekst</a:t>
+              <a:t>open-source; Prismatic VLM + 7B LLaMA; tokeny akcji jako tekst</a:t>
             </a:r>
             <a:endParaRPr lang="en-US" sz="1450" dirty="0"/>
           </a:p>
@@ -6507,6 +6598,17 @@
               <a:buChar char="•"/>
             </a:pPr>
             <a:r>
+              <a:rPr lang="en-US" sz="1450" b="1" dirty="0">
+                <a:solidFill>
+                  <a:srgbClr val="0D1B2A"/>
+                </a:solidFill>
+                <a:latin typeface="Calibri" pitchFamily="34" charset="0"/>
+                <a:ea typeface="Calibri" pitchFamily="34" charset="-122"/>
+                <a:cs typeface="Calibri" pitchFamily="34" charset="-120"/>
+              </a:rPr>
+              <a:t>π0 (Physical Intelligence, 2024): </a:t>
+            </a:r>
+            <a:r>
               <a:rPr lang="en-US" sz="1450" dirty="0">
                 <a:solidFill>
                   <a:srgbClr val="0D1B2A"/>
@@ -6515,7 +6617,7 @@
                 <a:ea typeface="Calibri" pitchFamily="34" charset="-122"/>
                 <a:cs typeface="Calibri" pitchFamily="34" charset="-120"/>
               </a:rPr>
-              <a:t>π0 (Physical Intelligence, 2024): diffusion policy head dla ciągłych akcji; duże słownictwo gestów</a:t>
+              <a:t>diffusion policy head dla ciągłych akcji; duże słownictwo gestów</a:t>
             </a:r>
             <a:endParaRPr lang="en-US" sz="1450" dirty="0"/>
           </a:p>
@@ -6528,6 +6630,17 @@
               <a:buChar char="•"/>
             </a:pPr>
             <a:r>
+              <a:rPr lang="en-US" sz="1450" b="1" dirty="0">
+                <a:solidFill>
+                  <a:srgbClr val="0D1B2A"/>
+                </a:solidFill>
+                <a:latin typeface="Calibri" pitchFamily="34" charset="0"/>
+                <a:ea typeface="Calibri" pitchFamily="34" charset="-122"/>
+                <a:cs typeface="Calibri" pitchFamily="34" charset="-120"/>
+              </a:rPr>
+              <a:t>Octo (Berkeley, 2024): </a:t>
+            </a:r>
+            <a:r>
               <a:rPr lang="en-US" sz="1450" dirty="0">
                 <a:solidFill>
                   <a:srgbClr val="0D1B2A"/>
@@ -6536,7 +6649,7 @@
                 <a:ea typeface="Calibri" pitchFamily="34" charset="-122"/>
                 <a:cs typeface="Calibri" pitchFamily="34" charset="-120"/>
               </a:rPr>
-              <a:t>Octo (Berkeley, 2024): transformer-based; multi-task; przyjmuje różne modalności wejściowe</a:t>
+              <a:t>transformer-based; multi-task; przyjmuje różne modalności wejściowe</a:t>
             </a:r>
             <a:endParaRPr lang="en-US" sz="1450" dirty="0"/>
           </a:p>
@@ -6549,6 +6662,17 @@
               <a:buChar char="•"/>
             </a:pPr>
             <a:r>
+              <a:rPr lang="en-US" sz="1450" b="1" dirty="0">
+                <a:solidFill>
+                  <a:srgbClr val="0D1B2A"/>
+                </a:solidFill>
+                <a:latin typeface="Calibri" pitchFamily="34" charset="0"/>
+                <a:ea typeface="Calibri" pitchFamily="34" charset="-122"/>
+                <a:cs typeface="Calibri" pitchFamily="34" charset="-120"/>
+              </a:rPr>
+              <a:t>Kluczowa różnica od klasycznej polityki RL</a:t>
+            </a:r>
+            <a:r>
               <a:rPr lang="en-US" sz="1450" dirty="0">
                 <a:solidFill>
                   <a:srgbClr val="0D1B2A"/>
@@ -6557,7 +6681,7 @@
                 <a:ea typeface="Calibri" pitchFamily="34" charset="-122"/>
                 <a:cs typeface="Calibri" pitchFamily="34" charset="-120"/>
               </a:rPr>
-              <a:t>Kluczowa różnica od klasycznej polityki RL: VLA używa wiedzy językowej do generalizacji zero-shot</a:t>
+              <a:t>: VLA używa wiedzy językowej do generalizacji zero-shot</a:t>
             </a:r>
             <a:endParaRPr lang="en-US" sz="1450" dirty="0"/>
           </a:p>
@@ -7546,7 +7670,7 @@
           <a:bodyPr wrap="square" lIns="63500" tIns="101600" rIns="63500" bIns="63500" rtlCol="0" anchor="t"/>
           <a:lstStyle/>
           <a:p>
-            <a:pPr marL="342900" indent="-342900">
+            <a:pPr marL="144000" indent="-144000">
               <a:spcAft>
                 <a:spcPts val="800"/>
               </a:spcAft>
@@ -7554,6 +7678,17 @@
               <a:buChar char="•"/>
             </a:pPr>
             <a:r>
+              <a:rPr lang="en-US" sz="1200" b="1" dirty="0">
+                <a:solidFill>
+                  <a:srgbClr val="90E0EF"/>
+                </a:solidFill>
+                <a:latin typeface="Calibri" pitchFamily="34" charset="0"/>
+                <a:ea typeface="Calibri" pitchFamily="34" charset="-122"/>
+                <a:cs typeface="Calibri" pitchFamily="34" charset="-120"/>
+              </a:rPr>
+              <a:t>Częstość wyjść</a:t>
+            </a:r>
+            <a:r>
               <a:rPr lang="en-US" sz="1200" dirty="0">
                 <a:solidFill>
                   <a:srgbClr val="90E0EF"/>
@@ -7562,7 +7697,7 @@
                 <a:ea typeface="Calibri" pitchFamily="34" charset="-122"/>
                 <a:cs typeface="Calibri" pitchFamily="34" charset="-120"/>
               </a:rPr>
-              <a:t>Częstość wyjść: </a:t>
+              <a:t>: </a:t>
             </a:r>
             <a:r>
               <a:rPr lang="en-US" sz="1200" dirty="0" smtClean="0">
@@ -7589,7 +7724,7 @@
             <a:endParaRPr lang="en-US" sz="1200" dirty="0"/>
           </a:p>
           <a:p>
-            <a:pPr marL="342900" indent="-342900">
+            <a:pPr marL="144000" indent="-144000">
               <a:spcAft>
                 <a:spcPts val="800"/>
               </a:spcAft>
@@ -7597,6 +7732,17 @@
               <a:buChar char="•"/>
             </a:pPr>
             <a:r>
+              <a:rPr lang="en-US" sz="1200" b="1" dirty="0">
+                <a:solidFill>
+                  <a:srgbClr val="90E0EF"/>
+                </a:solidFill>
+                <a:latin typeface="Calibri" pitchFamily="34" charset="0"/>
+                <a:ea typeface="Calibri" pitchFamily="34" charset="-122"/>
+                <a:cs typeface="Calibri" pitchFamily="34" charset="-120"/>
+              </a:rPr>
+              <a:t>Buforowanie akcji</a:t>
+            </a:r>
+            <a:r>
               <a:rPr lang="en-US" sz="1200" dirty="0">
                 <a:solidFill>
                   <a:srgbClr val="90E0EF"/>
@@ -7605,12 +7751,12 @@
                 <a:ea typeface="Calibri" pitchFamily="34" charset="-122"/>
                 <a:cs typeface="Calibri" pitchFamily="34" charset="-120"/>
               </a:rPr>
-              <a:t>Buforowanie akcji: temporal ensemble lub action chunking</a:t>
+              <a:t>: temporal ensemble lub action chunking</a:t>
             </a:r>
             <a:endParaRPr lang="en-US" sz="1200" dirty="0"/>
           </a:p>
           <a:p>
-            <a:pPr marL="342900" indent="-342900">
+            <a:pPr marL="144000" indent="-144000">
               <a:spcAft>
                 <a:spcPts val="800"/>
               </a:spcAft>
@@ -7618,6 +7764,17 @@
               <a:buChar char="•"/>
             </a:pPr>
             <a:r>
+              <a:rPr lang="en-US" sz="1200" b="1" dirty="0">
+                <a:solidFill>
+                  <a:srgbClr val="90E0EF"/>
+                </a:solidFill>
+                <a:latin typeface="Calibri" pitchFamily="34" charset="0"/>
+                <a:ea typeface="Calibri" pitchFamily="34" charset="-122"/>
+                <a:cs typeface="Calibri" pitchFamily="34" charset="-120"/>
+              </a:rPr>
+              <a:t>Fine-tuning</a:t>
+            </a:r>
+            <a:r>
               <a:rPr lang="en-US" sz="1200" dirty="0">
                 <a:solidFill>
                   <a:srgbClr val="90E0EF"/>
@@ -7626,7 +7783,7 @@
                 <a:ea typeface="Calibri" pitchFamily="34" charset="-122"/>
                 <a:cs typeface="Calibri" pitchFamily="34" charset="-120"/>
               </a:rPr>
-              <a:t>Fine-tuning: ~</a:t>
+              <a:t>: ~</a:t>
             </a:r>
             <a:r>
               <a:rPr lang="en-US" sz="1200" dirty="0" smtClean="0">
@@ -7653,7 +7810,7 @@
             <a:endParaRPr lang="en-US" sz="1200" dirty="0"/>
           </a:p>
           <a:p>
-            <a:pPr marL="342900" indent="-342900">
+            <a:pPr marL="144000" indent="-144000">
               <a:spcAft>
                 <a:spcPts val="800"/>
               </a:spcAft>
@@ -7674,7 +7831,7 @@
             <a:endParaRPr lang="en-US" sz="1200" dirty="0"/>
           </a:p>
           <a:p>
-            <a:pPr marL="342900" indent="-342900">
+            <a:pPr marL="144000" indent="-144000">
               <a:spcAft>
                 <a:spcPts val="800"/>
               </a:spcAft>
@@ -7682,6 +7839,17 @@
               <a:buChar char="•"/>
             </a:pPr>
             <a:r>
+              <a:rPr lang="en-US" sz="1200" b="1" dirty="0">
+                <a:solidFill>
+                  <a:srgbClr val="90E0EF"/>
+                </a:solidFill>
+                <a:latin typeface="Calibri" pitchFamily="34" charset="0"/>
+                <a:ea typeface="Calibri" pitchFamily="34" charset="-122"/>
+                <a:cs typeface="Calibri" pitchFamily="34" charset="-120"/>
+              </a:rPr>
+              <a:t>Deployment</a:t>
+            </a:r>
+            <a:r>
               <a:rPr lang="en-US" sz="1200" dirty="0">
                 <a:solidFill>
                   <a:srgbClr val="90E0EF"/>
@@ -7690,12 +7858,12 @@
                 <a:ea typeface="Calibri" pitchFamily="34" charset="-122"/>
                 <a:cs typeface="Calibri" pitchFamily="34" charset="-120"/>
               </a:rPr>
-              <a:t>Deployment: Jetson AGX Orin (7B q4) ≈ 3 Hz</a:t>
+              <a:t>: Jetson AGX Orin (7B q4) ≈ 3 Hz</a:t>
             </a:r>
             <a:endParaRPr lang="en-US" sz="1200" dirty="0"/>
           </a:p>
           <a:p>
-            <a:pPr marL="342900" indent="-342900">
+            <a:pPr marL="144000" indent="-144000">
               <a:spcAft>
                 <a:spcPts val="800"/>
               </a:spcAft>
@@ -7703,6 +7871,17 @@
               <a:buChar char="•"/>
             </a:pPr>
             <a:r>
+              <a:rPr lang="en-US" sz="1200" b="1" dirty="0">
+                <a:solidFill>
+                  <a:srgbClr val="90E0EF"/>
+                </a:solidFill>
+                <a:latin typeface="Calibri" pitchFamily="34" charset="0"/>
+                <a:ea typeface="Calibri" pitchFamily="34" charset="-122"/>
+                <a:cs typeface="Calibri" pitchFamily="34" charset="-120"/>
+              </a:rPr>
+              <a:t>Bezpieczeństwo</a:t>
+            </a:r>
+            <a:r>
               <a:rPr lang="en-US" sz="1200" dirty="0">
                 <a:solidFill>
                   <a:srgbClr val="90E0EF"/>
@@ -7711,7 +7890,7 @@
                 <a:ea typeface="Calibri" pitchFamily="34" charset="-122"/>
                 <a:cs typeface="Calibri" pitchFamily="34" charset="-120"/>
               </a:rPr>
-              <a:t>Bezpieczeństwo: clip akcji + velocity guard</a:t>
+              <a:t>: clip akcji + velocity guard</a:t>
             </a:r>
             <a:endParaRPr lang="en-US" sz="1200" dirty="0"/>
           </a:p>
@@ -8014,6 +8193,17 @@
               <a:buChar char="•"/>
             </a:pPr>
             <a:r>
+              <a:rPr lang="en-US" sz="1400" b="1" spc="-40" dirty="0">
+                <a:solidFill>
+                  <a:srgbClr val="0D1B2A"/>
+                </a:solidFill>
+                <a:latin typeface="Calibri" pitchFamily="34" charset="0"/>
+                <a:ea typeface="Calibri" pitchFamily="34" charset="-122"/>
+                <a:cs typeface="Calibri" pitchFamily="34" charset="-120"/>
+              </a:rPr>
+              <a:t>Base</a:t>
+            </a:r>
+            <a:r>
               <a:rPr lang="en-US" sz="1400" spc="-40" dirty="0">
                 <a:solidFill>
                   <a:srgbClr val="0D1B2A"/>
@@ -8022,7 +8212,7 @@
                 <a:ea typeface="Calibri" pitchFamily="34" charset="-122"/>
                 <a:cs typeface="Calibri" pitchFamily="34" charset="-120"/>
               </a:rPr>
-              <a:t>Base: PaLI-X 55B lub PaLM-E 562B</a:t>
+              <a:t>: PaLI-X 55B lub PaLM-E 562B</a:t>
             </a:r>
             <a:endParaRPr lang="en-US" sz="1400" spc="-40" dirty="0"/>
           </a:p>
@@ -8035,6 +8225,17 @@
               <a:buChar char="•"/>
             </a:pPr>
             <a:r>
+              <a:rPr lang="en-US" sz="1400" b="1" spc="-40" dirty="0">
+                <a:solidFill>
+                  <a:srgbClr val="0D1B2A"/>
+                </a:solidFill>
+                <a:latin typeface="Calibri" pitchFamily="34" charset="0"/>
+                <a:ea typeface="Calibri" pitchFamily="34" charset="-122"/>
+                <a:cs typeface="Calibri" pitchFamily="34" charset="-120"/>
+              </a:rPr>
+              <a:t>Tokeny akcji</a:t>
+            </a:r>
+            <a:r>
               <a:rPr lang="en-US" sz="1400" spc="-40" dirty="0">
                 <a:solidFill>
                   <a:srgbClr val="0D1B2A"/>
@@ -8043,7 +8244,7 @@
                 <a:ea typeface="Calibri" pitchFamily="34" charset="-122"/>
                 <a:cs typeface="Calibri" pitchFamily="34" charset="-120"/>
               </a:rPr>
-              <a:t>Tokeny akcji: dyskretne </a:t>
+              <a:t>: dyskretne </a:t>
             </a:r>
             <a:r>
               <a:rPr lang="en-US" sz="1400" i="1" spc="-40" dirty="0">
@@ -8280,6 +8481,17 @@
               <a:buChar char="•"/>
             </a:pPr>
             <a:r>
+              <a:rPr lang="en-US" sz="1400" b="1" spc="-40" dirty="0">
+                <a:solidFill>
+                  <a:srgbClr val="0D1B2A"/>
+                </a:solidFill>
+                <a:latin typeface="Calibri" pitchFamily="34" charset="0"/>
+                <a:ea typeface="Calibri" pitchFamily="34" charset="-122"/>
+                <a:cs typeface="Calibri" pitchFamily="34" charset="-120"/>
+              </a:rPr>
+              <a:t>Base</a:t>
+            </a:r>
+            <a:r>
               <a:rPr lang="en-US" sz="1400" spc="-40" dirty="0">
                 <a:solidFill>
                   <a:srgbClr val="0D1B2A"/>
@@ -8288,7 +8500,7 @@
                 <a:ea typeface="Calibri" pitchFamily="34" charset="-122"/>
                 <a:cs typeface="Calibri" pitchFamily="34" charset="-120"/>
               </a:rPr>
-              <a:t>Base: Prismatic </a:t>
+              <a:t>: Prismatic </a:t>
             </a:r>
             <a:r>
               <a:rPr lang="en-US" sz="1400" i="1" spc="-40" dirty="0">
@@ -8323,6 +8535,17 @@
               <a:buChar char="•"/>
             </a:pPr>
             <a:r>
+              <a:rPr lang="en-US" sz="1400" b="1" spc="-40" dirty="0">
+                <a:solidFill>
+                  <a:srgbClr val="0D1B2A"/>
+                </a:solidFill>
+                <a:latin typeface="Calibri" pitchFamily="34" charset="0"/>
+                <a:ea typeface="Calibri" pitchFamily="34" charset="-122"/>
+                <a:cs typeface="Calibri" pitchFamily="34" charset="-120"/>
+              </a:rPr>
+              <a:t>Open source</a:t>
+            </a:r>
+            <a:r>
               <a:rPr lang="en-US" sz="1400" spc="-40" dirty="0">
                 <a:solidFill>
                   <a:srgbClr val="0D1B2A"/>
@@ -8331,7 +8554,7 @@
                 <a:ea typeface="Calibri" pitchFamily="34" charset="-122"/>
                 <a:cs typeface="Calibri" pitchFamily="34" charset="-120"/>
               </a:rPr>
-              <a:t>Open source: wagi na HuggingFace</a:t>
+              <a:t>: wagi na HuggingFace</a:t>
             </a:r>
             <a:endParaRPr lang="en-US" sz="1400" spc="-40" dirty="0"/>
           </a:p>
@@ -8547,8 +8770,8 @@
         </p:nvSpPr>
         <p:spPr>
           <a:xfrm>
-            <a:off x="6144768" y="1627632"/>
-            <a:ext cx="2432304" cy="3154680"/>
+            <a:off x="6096000" y="1627632"/>
+            <a:ext cx="2590800" cy="3154680"/>
           </a:xfrm>
           <a:prstGeom prst="rect">
             <a:avLst/>
@@ -8568,6 +8791,17 @@
               <a:buChar char="•"/>
             </a:pPr>
             <a:r>
+              <a:rPr lang="en-US" sz="1400" b="1" spc="-40" dirty="0">
+                <a:solidFill>
+                  <a:srgbClr val="0D1B2A"/>
+                </a:solidFill>
+                <a:latin typeface="Calibri" pitchFamily="34" charset="0"/>
+                <a:ea typeface="Calibri" pitchFamily="34" charset="-122"/>
+                <a:cs typeface="Calibri" pitchFamily="34" charset="-120"/>
+              </a:rPr>
+              <a:t>π0</a:t>
+            </a:r>
+            <a:r>
               <a:rPr lang="en-US" sz="1400" spc="-40" dirty="0">
                 <a:solidFill>
                   <a:srgbClr val="0D1B2A"/>
@@ -8576,7 +8810,7 @@
                 <a:ea typeface="Calibri" pitchFamily="34" charset="-122"/>
                 <a:cs typeface="Calibri" pitchFamily="34" charset="-120"/>
               </a:rPr>
-              <a:t>π0: diffusion action head </a:t>
+              <a:t>: diffusion action head </a:t>
             </a:r>
             <a:r>
               <a:rPr lang="en-US" sz="1400" i="1" spc="-40" dirty="0">
@@ -8621,6 +8855,17 @@
               <a:buChar char="•"/>
             </a:pPr>
             <a:r>
+              <a:rPr lang="en-US" sz="1400" b="1" spc="-40" dirty="0">
+                <a:solidFill>
+                  <a:srgbClr val="0D1B2A"/>
+                </a:solidFill>
+                <a:latin typeface="Calibri" pitchFamily="34" charset="0"/>
+                <a:ea typeface="Calibri" pitchFamily="34" charset="-122"/>
+                <a:cs typeface="Calibri" pitchFamily="34" charset="-120"/>
+              </a:rPr>
+              <a:t>Octo</a:t>
+            </a:r>
+            <a:r>
               <a:rPr lang="en-US" sz="1400" spc="-40" dirty="0">
                 <a:solidFill>
                   <a:srgbClr val="0D1B2A"/>
@@ -8629,7 +8874,7 @@
                 <a:ea typeface="Calibri" pitchFamily="34" charset="-122"/>
                 <a:cs typeface="Calibri" pitchFamily="34" charset="-120"/>
               </a:rPr>
-              <a:t>Octo: multi-task transformer policy</a:t>
+              <a:t>: multi-task transformer policy</a:t>
             </a:r>
             <a:endParaRPr lang="en-US" sz="1400" spc="-40" dirty="0"/>
           </a:p>
@@ -8642,6 +8887,17 @@
               <a:buChar char="•"/>
             </a:pPr>
             <a:r>
+              <a:rPr lang="en-US" sz="1400" b="1" spc="-40" dirty="0">
+                <a:solidFill>
+                  <a:srgbClr val="0D1B2A"/>
+                </a:solidFill>
+                <a:latin typeface="Calibri" pitchFamily="34" charset="0"/>
+                <a:ea typeface="Calibri" pitchFamily="34" charset="-122"/>
+                <a:cs typeface="Calibri" pitchFamily="34" charset="-120"/>
+              </a:rPr>
+              <a:t>Modular</a:t>
+            </a:r>
+            <a:r>
               <a:rPr lang="en-US" sz="1400" spc="-40" dirty="0">
                 <a:solidFill>
                   <a:srgbClr val="0D1B2A"/>
@@ -8650,7 +8906,7 @@
                 <a:ea typeface="Calibri" pitchFamily="34" charset="-122"/>
                 <a:cs typeface="Calibri" pitchFamily="34" charset="-120"/>
               </a:rPr>
-              <a:t>Modular: różne enkodery wizji</a:t>
+              <a:t>: różne enkodery wizji</a:t>
             </a:r>
             <a:endParaRPr lang="en-US" sz="1400" spc="-40" dirty="0"/>
           </a:p>
@@ -8845,7 +9101,7 @@
               <a:buNone/>
             </a:pPr>
             <a:r>
-              <a:rPr lang="en-US" sz="2400" b="1" dirty="0">
+              <a:rPr lang="en-US" sz="2400" b="1" dirty="0" err="1">
                 <a:solidFill>
                   <a:srgbClr val="FFFFFF"/>
                 </a:solidFill>
@@ -8853,10 +9109,10 @@
                 <a:ea typeface="Trebuchet MS" pitchFamily="34" charset="-122"/>
                 <a:cs typeface="Trebuchet MS" pitchFamily="34" charset="-120"/>
               </a:rPr>
-              <a:t>Tokenizacja </a:t>
-            </a:r>
-            <a:r>
-              <a:rPr lang="en-US" sz="2400" b="1" dirty="0" err="1">
+              <a:t>Tokenizacja</a:t>
+            </a:r>
+            <a:r>
+              <a:rPr lang="en-US" sz="2400" b="1" dirty="0">
                 <a:solidFill>
                   <a:srgbClr val="FFFFFF"/>
                 </a:solidFill>
@@ -8864,10 +9120,10 @@
                 <a:ea typeface="Trebuchet MS" pitchFamily="34" charset="-122"/>
                 <a:cs typeface="Trebuchet MS" pitchFamily="34" charset="-120"/>
               </a:rPr>
-              <a:t>akcji</a:t>
-            </a:r>
-            <a:r>
-              <a:rPr lang="en-US" sz="2400" b="1" dirty="0">
+              <a:t> </a:t>
+            </a:r>
+            <a:r>
+              <a:rPr lang="en-US" sz="2400" b="1" dirty="0" err="1" smtClean="0">
                 <a:solidFill>
                   <a:srgbClr val="FFFFFF"/>
                 </a:solidFill>
@@ -8875,10 +9131,10 @@
                 <a:ea typeface="Trebuchet MS" pitchFamily="34" charset="-122"/>
                 <a:cs typeface="Trebuchet MS" pitchFamily="34" charset="-120"/>
               </a:rPr>
-              <a:t> </a:t>
-            </a:r>
-            <a:r>
-              <a:rPr lang="en-US" sz="2400" b="1" dirty="0" smtClean="0">
+              <a:t>akcji</a:t>
+            </a:r>
+            <a:r>
+              <a:rPr lang="pl-PL" sz="2400" b="1" dirty="0">
                 <a:solidFill>
                   <a:srgbClr val="FFFFFF"/>
                 </a:solidFill>
@@ -8886,10 +9142,10 @@
                 <a:ea typeface="Trebuchet MS" pitchFamily="34" charset="-122"/>
                 <a:cs typeface="Trebuchet MS" pitchFamily="34" charset="-120"/>
               </a:rPr>
-              <a:t>- </a:t>
-            </a:r>
-            <a:r>
-              <a:rPr lang="en-US" sz="2400" b="1" dirty="0">
+              <a:t>:</a:t>
+            </a:r>
+            <a:r>
+              <a:rPr lang="en-US" sz="2400" b="1" dirty="0" smtClean="0">
                 <a:solidFill>
                   <a:srgbClr val="FFFFFF"/>
                 </a:solidFill>
@@ -8897,6 +9153,17 @@
                 <a:ea typeface="Trebuchet MS" pitchFamily="34" charset="-122"/>
                 <a:cs typeface="Trebuchet MS" pitchFamily="34" charset="-120"/>
               </a:rPr>
+              <a:t> </a:t>
+            </a:r>
+            <a:r>
+              <a:rPr lang="en-US" sz="2400" b="1" dirty="0">
+                <a:solidFill>
+                  <a:srgbClr val="FFFFFF"/>
+                </a:solidFill>
+                <a:latin typeface="Trebuchet MS" pitchFamily="34" charset="0"/>
+                <a:ea typeface="Trebuchet MS" pitchFamily="34" charset="-122"/>
+                <a:cs typeface="Trebuchet MS" pitchFamily="34" charset="-120"/>
+              </a:rPr>
               <a:t>jak VLA generuje ruch</a:t>
             </a:r>
             <a:endParaRPr lang="en-US" sz="2400" dirty="0"/>
@@ -8912,7 +9179,7 @@
         <p:spPr>
           <a:xfrm>
             <a:off x="274320" y="1097280"/>
-            <a:ext cx="8595360" cy="3749040"/>
+            <a:ext cx="8595360" cy="3100070"/>
           </a:xfrm>
           <a:prstGeom prst="rect">
             <a:avLst/>
@@ -8943,8 +9210,8 @@
         </p:nvSpPr>
         <p:spPr>
           <a:xfrm>
-            <a:off x="457200" y="1188720"/>
-            <a:ext cx="8229600" cy="3520440"/>
+            <a:off x="336550" y="1188720"/>
+            <a:ext cx="8533130" cy="2926080"/>
           </a:xfrm>
           <a:prstGeom prst="rect">
             <a:avLst/>
@@ -8956,9 +9223,9 @@
           <a:bodyPr wrap="square" lIns="127000" tIns="127000" rIns="127000" bIns="127000" rtlCol="0" anchor="t"/>
           <a:lstStyle/>
           <a:p>
-            <a:pPr marL="342900" indent="-342900">
+            <a:pPr marL="144000" indent="-144000">
               <a:spcAft>
-                <a:spcPts val="900"/>
+                <a:spcPts val="1200"/>
               </a:spcAft>
               <a:buSzPct val="100000"/>
               <a:buChar char="•"/>
@@ -8988,9 +9255,9 @@
             <a:endParaRPr lang="en-US" sz="1600" dirty="0"/>
           </a:p>
           <a:p>
-            <a:pPr marL="342900" indent="-342900">
+            <a:pPr marL="144000" indent="-144000">
               <a:spcAft>
-                <a:spcPts val="900"/>
+                <a:spcPts val="1200"/>
               </a:spcAft>
               <a:buSzPct val="100000"/>
               <a:buChar char="•"/>
@@ -9020,9 +9287,9 @@
             <a:endParaRPr lang="en-US" sz="1600" dirty="0"/>
           </a:p>
           <a:p>
-            <a:pPr marL="342900" indent="-342900">
+            <a:pPr marL="144000" indent="-144000">
               <a:spcAft>
-                <a:spcPts val="900"/>
+                <a:spcPts val="1200"/>
               </a:spcAft>
               <a:buSzPct val="100000"/>
               <a:buChar char="•"/>
@@ -9052,9 +9319,9 @@
             <a:endParaRPr lang="en-US" sz="1600" dirty="0"/>
           </a:p>
           <a:p>
-            <a:pPr marL="342900" indent="-342900">
+            <a:pPr marL="144000" indent="-144000">
               <a:spcAft>
-                <a:spcPts val="900"/>
+                <a:spcPts val="1200"/>
               </a:spcAft>
               <a:buSzPct val="100000"/>
               <a:buChar char="•"/>
@@ -9084,9 +9351,9 @@
             <a:endParaRPr lang="en-US" sz="1600" dirty="0"/>
           </a:p>
           <a:p>
-            <a:pPr marL="342900" indent="-342900">
+            <a:pPr marL="144000" indent="-144000">
               <a:spcAft>
-                <a:spcPts val="900"/>
+                <a:spcPts val="1200"/>
               </a:spcAft>
               <a:buSzPct val="100000"/>
               <a:buChar char="•"/>
@@ -9111,7 +9378,7 @@
                 <a:ea typeface="Calibri" pitchFamily="34" charset="-122"/>
                 <a:cs typeface="Calibri" pitchFamily="34" charset="-120"/>
               </a:rPr>
-              <a:t>: ważona suma K ostatnich prognoz dla bieżącego </a:t>
+              <a:t>: ważona suma K ostatnich prognoz dla </a:t>
             </a:r>
             <a:r>
               <a:rPr lang="en-US" sz="1600" dirty="0" err="1">
@@ -9122,9 +9389,53 @@
                 <a:ea typeface="Calibri" pitchFamily="34" charset="-122"/>
                 <a:cs typeface="Calibri" pitchFamily="34" charset="-120"/>
               </a:rPr>
+              <a:t>bieżącego</a:t>
+            </a:r>
+            <a:r>
+              <a:rPr lang="en-US" sz="1600" dirty="0">
+                <a:solidFill>
+                  <a:srgbClr val="0D1B2A"/>
+                </a:solidFill>
+                <a:latin typeface="Calibri" pitchFamily="34" charset="0"/>
+                <a:ea typeface="Calibri" pitchFamily="34" charset="-122"/>
+                <a:cs typeface="Calibri" pitchFamily="34" charset="-120"/>
+              </a:rPr>
+              <a:t> </a:t>
+            </a:r>
+            <a:r>
+              <a:rPr lang="pl-PL" sz="1600" dirty="0" smtClean="0">
+                <a:solidFill>
+                  <a:srgbClr val="0D1B2A"/>
+                </a:solidFill>
+                <a:latin typeface="Calibri" pitchFamily="34" charset="0"/>
+                <a:ea typeface="Calibri" pitchFamily="34" charset="-122"/>
+                <a:cs typeface="Calibri" pitchFamily="34" charset="-120"/>
+              </a:rPr>
               <a:t>kroku</a:t>
             </a:r>
             <a:r>
+              <a:rPr lang="en-US" sz="1600" dirty="0" smtClean="0">
+                <a:solidFill>
+                  <a:srgbClr val="0D1B2A"/>
+                </a:solidFill>
+                <a:latin typeface="Calibri" pitchFamily="34" charset="0"/>
+                <a:ea typeface="Calibri" pitchFamily="34" charset="-122"/>
+                <a:cs typeface="Calibri" pitchFamily="34" charset="-120"/>
+              </a:rPr>
+              <a:t> </a:t>
+            </a:r>
+            <a:r>
+              <a:rPr lang="en-US" sz="1600" dirty="0" smtClean="0">
+                <a:solidFill>
+                  <a:srgbClr val="0D1B2A"/>
+                </a:solidFill>
+                <a:latin typeface="Calibri" pitchFamily="34" charset="0"/>
+                <a:ea typeface="Calibri" pitchFamily="34" charset="-122"/>
+                <a:cs typeface="Calibri" pitchFamily="34" charset="-120"/>
+              </a:rPr>
+              <a:t>- </a:t>
+            </a:r>
+            <a:r>
               <a:rPr lang="en-US" sz="1600" dirty="0">
                 <a:solidFill>
                   <a:srgbClr val="0D1B2A"/>
@@ -9133,36 +9444,14 @@
                 <a:ea typeface="Calibri" pitchFamily="34" charset="-122"/>
                 <a:cs typeface="Calibri" pitchFamily="34" charset="-120"/>
               </a:rPr>
-              <a:t> </a:t>
-            </a:r>
-            <a:r>
-              <a:rPr lang="en-US" sz="1600" dirty="0" smtClean="0">
-                <a:solidFill>
-                  <a:srgbClr val="0D1B2A"/>
-                </a:solidFill>
-                <a:latin typeface="Calibri" pitchFamily="34" charset="0"/>
-                <a:ea typeface="Calibri" pitchFamily="34" charset="-122"/>
-                <a:cs typeface="Calibri" pitchFamily="34" charset="-120"/>
-              </a:rPr>
-              <a:t>- </a:t>
-            </a:r>
-            <a:r>
-              <a:rPr lang="en-US" sz="1600" dirty="0">
-                <a:solidFill>
-                  <a:srgbClr val="0D1B2A"/>
-                </a:solidFill>
-                <a:latin typeface="Calibri" pitchFamily="34" charset="0"/>
-                <a:ea typeface="Calibri" pitchFamily="34" charset="-122"/>
-                <a:cs typeface="Calibri" pitchFamily="34" charset="-120"/>
-              </a:rPr>
               <a:t>wygładzenie ruchu</a:t>
             </a:r>
             <a:endParaRPr lang="en-US" sz="1600" dirty="0"/>
           </a:p>
           <a:p>
-            <a:pPr marL="342900" indent="-342900">
+            <a:pPr marL="144000" indent="-144000">
               <a:spcAft>
-                <a:spcPts val="900"/>
+                <a:spcPts val="1200"/>
               </a:spcAft>
               <a:buSzPct val="100000"/>
               <a:buChar char="•"/>
@@ -9192,9 +9481,9 @@
             <a:endParaRPr lang="en-US" sz="1600" dirty="0"/>
           </a:p>
           <a:p>
-            <a:pPr marL="342900" indent="-342900">
+            <a:pPr marL="144000" indent="-144000">
               <a:spcAft>
-                <a:spcPts val="900"/>
+                <a:spcPts val="1200"/>
               </a:spcAft>
               <a:buSzPct val="100000"/>
               <a:buChar char="•"/>
@@ -13171,9 +13460,9 @@
             <a:avLst/>
           </a:prstGeom>
           <a:solidFill>
-            <a:srgbClr val="0D1B2A"/>
+            <a:schemeClr val="bg1"/>
           </a:solidFill>
-          <a:ln w="25400">
+          <a:ln w="57150">
             <a:solidFill>
               <a:srgbClr val="0077A8"/>
             </a:solidFill>
@@ -13608,7 +13897,7 @@
               <a:buNone/>
             </a:pPr>
             <a:r>
-              <a:rPr lang="en-US" sz="1300" b="1" dirty="0">
+              <a:rPr lang="en-US" b="1" dirty="0">
                 <a:solidFill>
                   <a:srgbClr val="0D1B2A"/>
                 </a:solidFill>
@@ -13618,7 +13907,7 @@
               </a:rPr>
               <a:t>Sekcja 1</a:t>
             </a:r>
-            <a:endParaRPr lang="en-US" sz="1300" dirty="0"/>
+            <a:endParaRPr lang="en-US" dirty="0"/>
           </a:p>
         </p:txBody>
       </p:sp>
@@ -13647,7 +13936,7 @@
               <a:buNone/>
             </a:pPr>
             <a:r>
-              <a:rPr lang="en-US" sz="1100" dirty="0">
+              <a:rPr lang="en-US" sz="1600" dirty="0">
                 <a:solidFill>
                   <a:srgbClr val="475569"/>
                 </a:solidFill>
@@ -13658,7 +13947,7 @@
               <a:t>VLM </a:t>
             </a:r>
             <a:r>
-              <a:rPr lang="en-US" sz="1100" dirty="0" smtClean="0">
+              <a:rPr lang="en-US" sz="1600" dirty="0" smtClean="0">
                 <a:solidFill>
                   <a:srgbClr val="475569"/>
                 </a:solidFill>
@@ -13669,7 +13958,7 @@
               <a:t>- </a:t>
             </a:r>
             <a:r>
-              <a:rPr lang="en-US" sz="1100" dirty="0">
+              <a:rPr lang="en-US" sz="1600" dirty="0">
                 <a:solidFill>
                   <a:srgbClr val="475569"/>
                 </a:solidFill>
@@ -13679,7 +13968,7 @@
               </a:rPr>
               <a:t>architektura, modele CLIP/LLaVA/GPT-4V, grounding, zero-shot reasoning w robotyce</a:t>
             </a:r>
-            <a:endParaRPr lang="en-US" sz="1100" dirty="0"/>
+            <a:endParaRPr lang="en-US" sz="1600" dirty="0"/>
           </a:p>
         </p:txBody>
       </p:sp>
@@ -13765,7 +14054,7 @@
               <a:buNone/>
             </a:pPr>
             <a:r>
-              <a:rPr lang="en-US" sz="1300" b="1" dirty="0">
+              <a:rPr lang="en-US" b="1" dirty="0">
                 <a:solidFill>
                   <a:srgbClr val="0D1B2A"/>
                 </a:solidFill>
@@ -13775,7 +14064,7 @@
               </a:rPr>
               <a:t>Sekcja 2</a:t>
             </a:r>
-            <a:endParaRPr lang="en-US" sz="1300" dirty="0"/>
+            <a:endParaRPr lang="en-US" dirty="0"/>
           </a:p>
         </p:txBody>
       </p:sp>
@@ -13804,7 +14093,7 @@
               <a:buNone/>
             </a:pPr>
             <a:r>
-              <a:rPr lang="en-US" sz="1100" dirty="0">
+              <a:rPr lang="en-US" sz="1600" dirty="0">
                 <a:solidFill>
                   <a:srgbClr val="475569"/>
                 </a:solidFill>
@@ -13815,7 +14104,7 @@
               <a:t>VLA </a:t>
             </a:r>
             <a:r>
-              <a:rPr lang="en-US" sz="1100" dirty="0" smtClean="0">
+              <a:rPr lang="en-US" sz="1600" dirty="0" smtClean="0">
                 <a:solidFill>
                   <a:srgbClr val="475569"/>
                 </a:solidFill>
@@ -13826,7 +14115,7 @@
               <a:t>- </a:t>
             </a:r>
             <a:r>
-              <a:rPr lang="en-US" sz="1100" dirty="0">
+              <a:rPr lang="en-US" sz="1600" dirty="0">
                 <a:solidFill>
                   <a:srgbClr val="475569"/>
                 </a:solidFill>
@@ -13836,7 +14125,7 @@
               </a:rPr>
               <a:t>modele RT-2, OpenVLA, π0, Octo; architektura i generowanie akcji z języka i wizji</a:t>
             </a:r>
-            <a:endParaRPr lang="en-US" sz="1100" dirty="0"/>
+            <a:endParaRPr lang="en-US" sz="1600" dirty="0"/>
           </a:p>
         </p:txBody>
       </p:sp>
@@ -13922,7 +14211,7 @@
               <a:buNone/>
             </a:pPr>
             <a:r>
-              <a:rPr lang="en-US" sz="1300" b="1" dirty="0">
+              <a:rPr lang="en-US" b="1" dirty="0">
                 <a:solidFill>
                   <a:srgbClr val="0D1B2A"/>
                 </a:solidFill>
@@ -13932,7 +14221,7 @@
               </a:rPr>
               <a:t>Sekcja 3</a:t>
             </a:r>
-            <a:endParaRPr lang="en-US" sz="1300" dirty="0"/>
+            <a:endParaRPr lang="en-US" dirty="0"/>
           </a:p>
         </p:txBody>
       </p:sp>
@@ -13961,7 +14250,7 @@
               <a:buNone/>
             </a:pPr>
             <a:r>
-              <a:rPr lang="en-US" sz="1100" dirty="0">
+              <a:rPr lang="en-US" sz="1600" dirty="0">
                 <a:solidFill>
                   <a:srgbClr val="475569"/>
                 </a:solidFill>
@@ -13971,7 +14260,7 @@
               </a:rPr>
               <a:t>Praktyczne zastosowania: nawigacja semantyczna, instruction following, integracja z ROS 2</a:t>
             </a:r>
-            <a:endParaRPr lang="en-US" sz="1100" dirty="0"/>
+            <a:endParaRPr lang="en-US" sz="1600" dirty="0"/>
           </a:p>
         </p:txBody>
       </p:sp>
@@ -14057,7 +14346,7 @@
               <a:buNone/>
             </a:pPr>
             <a:r>
-              <a:rPr lang="en-US" sz="1300" b="1" dirty="0">
+              <a:rPr lang="en-US" b="1" dirty="0">
                 <a:solidFill>
                   <a:srgbClr val="0D1B2A"/>
                 </a:solidFill>
@@ -14067,7 +14356,7 @@
               </a:rPr>
               <a:t>Kody Python</a:t>
             </a:r>
-            <a:endParaRPr lang="en-US" sz="1300" dirty="0"/>
+            <a:endParaRPr lang="en-US" dirty="0"/>
           </a:p>
         </p:txBody>
       </p:sp>
@@ -14096,7 +14385,7 @@
               <a:buNone/>
             </a:pPr>
             <a:r>
-              <a:rPr lang="en-US" sz="1100" dirty="0">
+              <a:rPr lang="en-US" sz="1600" dirty="0">
                 <a:solidFill>
                   <a:srgbClr val="475569"/>
                 </a:solidFill>
@@ -14106,7 +14395,7 @@
               </a:rPr>
               <a:t>Zapytanie VLM o scenę, grounding w mapie, router VLM→planner, pętla VLA w symulacji</a:t>
             </a:r>
-            <a:endParaRPr lang="en-US" sz="1100" dirty="0"/>
+            <a:endParaRPr lang="en-US" sz="1600" dirty="0"/>
           </a:p>
         </p:txBody>
       </p:sp>
@@ -14891,7 +15180,7 @@
                 <a:ea typeface="Trebuchet MS" pitchFamily="34" charset="-122"/>
                 <a:cs typeface="Trebuchet MS" pitchFamily="34" charset="-120"/>
               </a:rPr>
-              <a:t>Pipeline instruction following </a:t>
+              <a:t>Pipeline instruction </a:t>
             </a:r>
             <a:r>
               <a:rPr lang="en-US" sz="2400" b="1" dirty="0" smtClean="0">
@@ -14902,7 +15191,29 @@
                 <a:ea typeface="Trebuchet MS" pitchFamily="34" charset="-122"/>
                 <a:cs typeface="Trebuchet MS" pitchFamily="34" charset="-120"/>
               </a:rPr>
-              <a:t>- </a:t>
+              <a:t>following</a:t>
+            </a:r>
+            <a:r>
+              <a:rPr lang="pl-PL" sz="2400" b="1" dirty="0" smtClean="0">
+                <a:solidFill>
+                  <a:srgbClr val="FFFFFF"/>
+                </a:solidFill>
+                <a:latin typeface="Trebuchet MS" pitchFamily="34" charset="0"/>
+                <a:ea typeface="Trebuchet MS" pitchFamily="34" charset="-122"/>
+                <a:cs typeface="Trebuchet MS" pitchFamily="34" charset="-120"/>
+              </a:rPr>
+              <a:t>:</a:t>
+            </a:r>
+            <a:r>
+              <a:rPr lang="en-US" sz="2400" b="1" dirty="0" smtClean="0">
+                <a:solidFill>
+                  <a:srgbClr val="FFFFFF"/>
+                </a:solidFill>
+                <a:latin typeface="Trebuchet MS" pitchFamily="34" charset="0"/>
+                <a:ea typeface="Trebuchet MS" pitchFamily="34" charset="-122"/>
+                <a:cs typeface="Trebuchet MS" pitchFamily="34" charset="-120"/>
+              </a:rPr>
+              <a:t> </a:t>
             </a:r>
             <a:r>
               <a:rPr lang="en-US" sz="2400" b="1" dirty="0">
@@ -19255,8 +19566,8 @@
         </p:nvSpPr>
         <p:spPr>
           <a:xfrm>
-            <a:off x="403098" y="965708"/>
-            <a:ext cx="8321040" cy="3167534"/>
+            <a:off x="314198" y="1048258"/>
+            <a:ext cx="6061202" cy="3167534"/>
           </a:xfrm>
           <a:prstGeom prst="rect">
             <a:avLst/>
@@ -19413,13 +19724,13 @@
               </a:lnSpc>
             </a:pPr>
             <a:r>
-              <a:rPr lang="pl-PL" sz="1050" dirty="0" err="1">
+              <a:rPr lang="pl-PL" sz="1050" dirty="0" smtClean="0">
                 <a:solidFill>
                   <a:srgbClr val="CE9178"/>
                 </a:solidFill>
                 <a:latin typeface="Consolas" panose="020B0609020204030204" pitchFamily="49" charset="0"/>
               </a:rPr>
-              <a:t>Zwroc</a:t>
+              <a:t>Zwróć </a:t>
             </a:r>
             <a:r>
               <a:rPr lang="pl-PL" sz="1050" dirty="0">
@@ -19428,7 +19739,7 @@
                 </a:solidFill>
                 <a:latin typeface="Consolas" panose="020B0609020204030204" pitchFamily="49" charset="0"/>
               </a:rPr>
-              <a:t> TYLKO JSON z polami:</a:t>
+              <a:t>TYLKO JSON z polami:</a:t>
             </a:r>
             <a:endParaRPr lang="pl-PL" sz="1050" dirty="0">
               <a:solidFill>
@@ -21232,7 +21543,7 @@
                 <a:ea typeface="Trebuchet MS" pitchFamily="34" charset="-122"/>
                 <a:cs typeface="Trebuchet MS" pitchFamily="34" charset="-120"/>
               </a:rPr>
-              <a:t>Integracja VLM/VLA z ROS 2 </a:t>
+              <a:t>Integracja VLM/VLA z ROS </a:t>
             </a:r>
             <a:r>
               <a:rPr lang="en-US" sz="2400" b="1" dirty="0" smtClean="0">
@@ -21243,10 +21554,10 @@
                 <a:ea typeface="Trebuchet MS" pitchFamily="34" charset="-122"/>
                 <a:cs typeface="Trebuchet MS" pitchFamily="34" charset="-120"/>
               </a:rPr>
-              <a:t>- </a:t>
-            </a:r>
-            <a:r>
-              <a:rPr lang="en-US" sz="2400" b="1" dirty="0">
+              <a:t>2</a:t>
+            </a:r>
+            <a:r>
+              <a:rPr lang="pl-PL" sz="2400" b="1" dirty="0" smtClean="0">
                 <a:solidFill>
                   <a:srgbClr val="FFFFFF"/>
                 </a:solidFill>
@@ -21254,6 +21565,28 @@
                 <a:ea typeface="Trebuchet MS" pitchFamily="34" charset="-122"/>
                 <a:cs typeface="Trebuchet MS" pitchFamily="34" charset="-120"/>
               </a:rPr>
+              <a:t>:</a:t>
+            </a:r>
+            <a:r>
+              <a:rPr lang="en-US" sz="2400" b="1" dirty="0" smtClean="0">
+                <a:solidFill>
+                  <a:srgbClr val="FFFFFF"/>
+                </a:solidFill>
+                <a:latin typeface="Trebuchet MS" pitchFamily="34" charset="0"/>
+                <a:ea typeface="Trebuchet MS" pitchFamily="34" charset="-122"/>
+                <a:cs typeface="Trebuchet MS" pitchFamily="34" charset="-120"/>
+              </a:rPr>
+              <a:t> </a:t>
+            </a:r>
+            <a:r>
+              <a:rPr lang="en-US" sz="2400" b="1" dirty="0">
+                <a:solidFill>
+                  <a:srgbClr val="FFFFFF"/>
+                </a:solidFill>
+                <a:latin typeface="Trebuchet MS" pitchFamily="34" charset="0"/>
+                <a:ea typeface="Trebuchet MS" pitchFamily="34" charset="-122"/>
+                <a:cs typeface="Trebuchet MS" pitchFamily="34" charset="-120"/>
+              </a:rPr>
               <a:t>wzorzec asynchroniczny</a:t>
             </a:r>
             <a:endParaRPr lang="en-US" sz="2400" dirty="0"/>
@@ -21269,7 +21602,7 @@
         <p:spPr>
           <a:xfrm>
             <a:off x="274320" y="1097280"/>
-            <a:ext cx="8595360" cy="3749040"/>
+            <a:ext cx="8595360" cy="3049270"/>
           </a:xfrm>
           <a:prstGeom prst="rect">
             <a:avLst/>
@@ -21301,7 +21634,7 @@
         <p:spPr>
           <a:xfrm>
             <a:off x="457200" y="1188720"/>
-            <a:ext cx="8229600" cy="3520440"/>
+            <a:ext cx="8229600" cy="2830830"/>
           </a:xfrm>
           <a:prstGeom prst="rect">
             <a:avLst/>
@@ -21315,7 +21648,7 @@
           <a:p>
             <a:pPr marL="144000" indent="-144000">
               <a:spcAft>
-                <a:spcPts val="1800"/>
+                <a:spcPts val="1200"/>
               </a:spcAft>
               <a:buSzPct val="100000"/>
               <a:buChar char="•"/>
@@ -21369,7 +21702,7 @@
           <a:p>
             <a:pPr marL="144000" indent="-144000">
               <a:spcAft>
-                <a:spcPts val="1800"/>
+                <a:spcPts val="1200"/>
               </a:spcAft>
               <a:buSzPct val="100000"/>
               <a:buChar char="•"/>
@@ -21401,7 +21734,7 @@
           <a:p>
             <a:pPr marL="144000" indent="-144000">
               <a:spcAft>
-                <a:spcPts val="1800"/>
+                <a:spcPts val="1200"/>
               </a:spcAft>
               <a:buSzPct val="100000"/>
               <a:buChar char="•"/>
@@ -21455,7 +21788,7 @@
           <a:p>
             <a:pPr marL="144000" indent="-144000">
               <a:spcAft>
-                <a:spcPts val="1800"/>
+                <a:spcPts val="1200"/>
               </a:spcAft>
               <a:buSzPct val="100000"/>
               <a:buChar char="•"/>
@@ -21509,7 +21842,7 @@
           <a:p>
             <a:pPr marL="144000" indent="-144000">
               <a:spcAft>
-                <a:spcPts val="1800"/>
+                <a:spcPts val="1200"/>
               </a:spcAft>
               <a:buSzPct val="100000"/>
               <a:buChar char="•"/>
@@ -21563,7 +21896,7 @@
           <a:p>
             <a:pPr marL="144000" indent="-144000">
               <a:spcAft>
-                <a:spcPts val="1800"/>
+                <a:spcPts val="1200"/>
               </a:spcAft>
               <a:buSzPct val="100000"/>
               <a:buChar char="•"/>
@@ -21595,7 +21928,7 @@
           <a:p>
             <a:pPr marL="144000" indent="-144000">
               <a:spcAft>
-                <a:spcPts val="1800"/>
+                <a:spcPts val="1200"/>
               </a:spcAft>
               <a:buSzPct val="100000"/>
               <a:buChar char="•"/>
@@ -24012,7 +24345,7 @@
                 <a:ea typeface="Trebuchet MS" pitchFamily="34" charset="-122"/>
                 <a:cs typeface="Trebuchet MS" pitchFamily="34" charset="-120"/>
               </a:rPr>
-              <a:t>Najlepsze praktyki </a:t>
+              <a:t>Najlepsze </a:t>
             </a:r>
             <a:r>
               <a:rPr lang="en-US" sz="2400" b="1" dirty="0" err="1">
@@ -24023,7 +24356,7 @@
                 <a:ea typeface="Trebuchet MS" pitchFamily="34" charset="-122"/>
                 <a:cs typeface="Trebuchet MS" pitchFamily="34" charset="-120"/>
               </a:rPr>
-              <a:t>inżynierskie</a:t>
+              <a:t>praktyki</a:t>
             </a:r>
             <a:r>
               <a:rPr lang="en-US" sz="2400" b="1" dirty="0">
@@ -24037,7 +24370,7 @@
               <a:t> </a:t>
             </a:r>
             <a:r>
-              <a:rPr lang="en-US" sz="2400" b="1" dirty="0" smtClean="0">
+              <a:rPr lang="en-US" sz="2400" b="1" dirty="0" err="1" smtClean="0">
                 <a:solidFill>
                   <a:srgbClr val="FFFFFF"/>
                 </a:solidFill>
@@ -24045,10 +24378,10 @@
                 <a:ea typeface="Trebuchet MS" pitchFamily="34" charset="-122"/>
                 <a:cs typeface="Trebuchet MS" pitchFamily="34" charset="-120"/>
               </a:rPr>
-              <a:t>- </a:t>
-            </a:r>
-            <a:r>
-              <a:rPr lang="en-US" sz="2400" b="1" dirty="0">
+              <a:t>inżynierskie</a:t>
+            </a:r>
+            <a:r>
+              <a:rPr lang="pl-PL" sz="2400" b="1" dirty="0">
                 <a:solidFill>
                   <a:srgbClr val="FFFFFF"/>
                 </a:solidFill>
@@ -24056,6 +24389,28 @@
                 <a:ea typeface="Trebuchet MS" pitchFamily="34" charset="-122"/>
                 <a:cs typeface="Trebuchet MS" pitchFamily="34" charset="-120"/>
               </a:rPr>
+              <a:t>:</a:t>
+            </a:r>
+            <a:r>
+              <a:rPr lang="en-US" sz="2400" b="1" dirty="0" smtClean="0">
+                <a:solidFill>
+                  <a:srgbClr val="FFFFFF"/>
+                </a:solidFill>
+                <a:latin typeface="Trebuchet MS" pitchFamily="34" charset="0"/>
+                <a:ea typeface="Trebuchet MS" pitchFamily="34" charset="-122"/>
+                <a:cs typeface="Trebuchet MS" pitchFamily="34" charset="-120"/>
+              </a:rPr>
+              <a:t> </a:t>
+            </a:r>
+            <a:r>
+              <a:rPr lang="en-US" sz="2400" b="1" dirty="0">
+                <a:solidFill>
+                  <a:srgbClr val="FFFFFF"/>
+                </a:solidFill>
+                <a:latin typeface="Trebuchet MS" pitchFamily="34" charset="0"/>
+                <a:ea typeface="Trebuchet MS" pitchFamily="34" charset="-122"/>
+                <a:cs typeface="Trebuchet MS" pitchFamily="34" charset="-120"/>
+              </a:rPr>
               <a:t>VLM/VLA w produkcji</a:t>
             </a:r>
             <a:endParaRPr lang="en-US" sz="2400" dirty="0"/>
@@ -24071,7 +24426,7 @@
         <p:spPr>
           <a:xfrm>
             <a:off x="274320" y="1097280"/>
-            <a:ext cx="8595360" cy="3749040"/>
+            <a:ext cx="8691880" cy="3061970"/>
           </a:xfrm>
           <a:prstGeom prst="rect">
             <a:avLst/>
@@ -24102,8 +24457,8 @@
         </p:nvSpPr>
         <p:spPr>
           <a:xfrm>
-            <a:off x="371707" y="1188720"/>
-            <a:ext cx="8422888" cy="3520440"/>
+            <a:off x="257406" y="1074420"/>
+            <a:ext cx="8848493" cy="2843530"/>
           </a:xfrm>
           <a:prstGeom prst="rect">
             <a:avLst/>
@@ -24188,7 +24543,7 @@
               <a:buChar char="•"/>
             </a:pPr>
             <a:r>
-              <a:rPr lang="en-US" sz="1600" b="1" spc="-60" dirty="0">
+              <a:rPr lang="en-US" sz="1600" b="1" spc="-100" dirty="0">
                 <a:solidFill>
                   <a:srgbClr val="0D1B2A"/>
                 </a:solidFill>
@@ -24199,28 +24554,17 @@
               <a:t>Sanity check akcji</a:t>
             </a:r>
             <a:r>
-              <a:rPr lang="en-US" sz="1600" spc="-60" dirty="0">
-                <a:solidFill>
-                  <a:srgbClr val="0D1B2A"/>
-                </a:solidFill>
-                <a:latin typeface="Calibri" pitchFamily="34" charset="0"/>
-                <a:ea typeface="Calibri" pitchFamily="34" charset="-122"/>
-                <a:cs typeface="Calibri" pitchFamily="34" charset="-120"/>
-              </a:rPr>
-              <a:t>: </a:t>
-            </a:r>
-            <a:r>
-              <a:rPr lang="en-US" sz="1600" spc="-80" dirty="0">
-                <a:solidFill>
-                  <a:srgbClr val="0D1B2A"/>
-                </a:solidFill>
-                <a:latin typeface="Calibri" pitchFamily="34" charset="0"/>
-                <a:ea typeface="Calibri" pitchFamily="34" charset="-122"/>
-                <a:cs typeface="Calibri" pitchFamily="34" charset="-120"/>
-              </a:rPr>
-              <a:t>każda akcja VLA clampowana do fizycznie osiągalnego zakresu; ZMP sprawdzany przed wykonaniem</a:t>
-            </a:r>
-            <a:endParaRPr lang="en-US" sz="1600" spc="-80" dirty="0"/>
+              <a:rPr lang="en-US" sz="1600" spc="-100" dirty="0">
+                <a:solidFill>
+                  <a:srgbClr val="0D1B2A"/>
+                </a:solidFill>
+                <a:latin typeface="Calibri" pitchFamily="34" charset="0"/>
+                <a:ea typeface="Calibri" pitchFamily="34" charset="-122"/>
+                <a:cs typeface="Calibri" pitchFamily="34" charset="-120"/>
+              </a:rPr>
+              <a:t>: każda akcja VLA clampowana do fizycznie osiągalnego zakresu; ZMP sprawdzany przed wykonaniem</a:t>
+            </a:r>
+            <a:endParaRPr lang="en-US" sz="1600" spc="-100" dirty="0"/>
           </a:p>
           <a:p>
             <a:pPr marL="144000" indent="-144000">
@@ -26493,9 +26837,9 @@
             <a:avLst/>
           </a:prstGeom>
           <a:solidFill>
-            <a:srgbClr val="0D1B2A"/>
+            <a:schemeClr val="bg1"/>
           </a:solidFill>
-          <a:ln w="25400">
+          <a:ln w="57150">
             <a:solidFill>
               <a:srgbClr val="A855F7"/>
             </a:solidFill>
@@ -26591,7 +26935,7 @@
               <a:buNone/>
             </a:pPr>
             <a:r>
-              <a:rPr lang="en-US" sz="2600" b="1" dirty="0">
+              <a:rPr lang="en-US" sz="3200" b="1" dirty="0">
                 <a:solidFill>
                   <a:srgbClr val="FFFFFF"/>
                 </a:solidFill>
@@ -26602,7 +26946,7 @@
               <a:t>VLM </a:t>
             </a:r>
             <a:r>
-              <a:rPr lang="en-US" sz="2600" b="1" dirty="0" smtClean="0">
+              <a:rPr lang="en-US" sz="3200" b="1" dirty="0" smtClean="0">
                 <a:solidFill>
                   <a:srgbClr val="FFFFFF"/>
                 </a:solidFill>
@@ -26613,7 +26957,7 @@
               <a:t>- </a:t>
             </a:r>
             <a:r>
-              <a:rPr lang="en-US" sz="2600" b="1" dirty="0">
+              <a:rPr lang="en-US" sz="3200" b="1" dirty="0">
                 <a:solidFill>
                   <a:srgbClr val="FFFFFF"/>
                 </a:solidFill>
@@ -26623,14 +26967,14 @@
               </a:rPr>
               <a:t>modele</a:t>
             </a:r>
-            <a:endParaRPr lang="en-US" sz="2600" dirty="0"/>
+            <a:endParaRPr lang="en-US" sz="3200" dirty="0"/>
           </a:p>
           <a:p>
             <a:pPr marL="0" indent="0">
               <a:buNone/>
             </a:pPr>
             <a:r>
-              <a:rPr lang="en-US" sz="2600" b="1" dirty="0">
+              <a:rPr lang="en-US" sz="3200" b="1" dirty="0">
                 <a:solidFill>
                   <a:srgbClr val="FFFFFF"/>
                 </a:solidFill>
@@ -26640,7 +26984,7 @@
               </a:rPr>
               <a:t>wizyjno-językowe</a:t>
             </a:r>
-            <a:endParaRPr lang="en-US" sz="2600" dirty="0"/>
+            <a:endParaRPr lang="en-US" sz="3200" dirty="0"/>
           </a:p>
         </p:txBody>
       </p:sp>
@@ -27086,7 +27430,7 @@
             <a:endParaRPr lang="en-US" sz="1600" spc="-60" dirty="0"/>
           </a:p>
           <a:p>
-            <a:pPr>
+            <a:pPr algn="just">
               <a:spcAft>
                 <a:spcPts val="900"/>
               </a:spcAft>
@@ -27253,18 +27597,209 @@
                 <a:ea typeface="Calibri" pitchFamily="34" charset="-122"/>
                 <a:cs typeface="Calibri" pitchFamily="34" charset="-120"/>
               </a:rPr>
-              <a:t>poprawnie rozwiązywane, a które nie.</a:t>
-            </a:r>
-            <a:endParaRPr lang="en-US" sz="1600" spc="-60" dirty="0"/>
-          </a:p>
-          <a:p>
-            <a:pPr lvl="1">
+              <a:t>poprawnie rozwiązywane, a </a:t>
+            </a:r>
+            <a:r>
+              <a:rPr lang="en-US" sz="1600" spc="-60" dirty="0" err="1">
+                <a:solidFill>
+                  <a:srgbClr val="0D1B2A"/>
+                </a:solidFill>
+                <a:latin typeface="Calibri" pitchFamily="34" charset="0"/>
+                <a:ea typeface="Calibri" pitchFamily="34" charset="-122"/>
+                <a:cs typeface="Calibri" pitchFamily="34" charset="-120"/>
+              </a:rPr>
+              <a:t>które</a:t>
+            </a:r>
+            <a:r>
+              <a:rPr lang="en-US" sz="1600" spc="-60" dirty="0">
+                <a:solidFill>
+                  <a:srgbClr val="0D1B2A"/>
+                </a:solidFill>
+                <a:latin typeface="Calibri" pitchFamily="34" charset="0"/>
+                <a:ea typeface="Calibri" pitchFamily="34" charset="-122"/>
+                <a:cs typeface="Calibri" pitchFamily="34" charset="-120"/>
+              </a:rPr>
+              <a:t> </a:t>
+            </a:r>
+            <a:r>
+              <a:rPr lang="en-US" sz="1600" spc="-60" dirty="0" err="1" smtClean="0">
+                <a:solidFill>
+                  <a:srgbClr val="0D1B2A"/>
+                </a:solidFill>
+                <a:latin typeface="Calibri" pitchFamily="34" charset="0"/>
+                <a:ea typeface="Calibri" pitchFamily="34" charset="-122"/>
+                <a:cs typeface="Calibri" pitchFamily="34" charset="-120"/>
+              </a:rPr>
+              <a:t>nie</a:t>
+            </a:r>
+            <a:r>
+              <a:rPr lang="en-US" sz="1600" spc="-60" dirty="0" smtClean="0">
+                <a:solidFill>
+                  <a:srgbClr val="0D1B2A"/>
+                </a:solidFill>
+                <a:latin typeface="Calibri" pitchFamily="34" charset="0"/>
+                <a:ea typeface="Calibri" pitchFamily="34" charset="-122"/>
+                <a:cs typeface="Calibri" pitchFamily="34" charset="-120"/>
+              </a:rPr>
+              <a:t>.</a:t>
+            </a:r>
+            <a:r>
+              <a:rPr lang="pl-PL" sz="1600" spc="-60" dirty="0"/>
+              <a:t> </a:t>
+            </a:r>
+            <a:r>
+              <a:rPr lang="en-US" sz="1600" spc="-60" dirty="0" err="1" smtClean="0">
+                <a:solidFill>
+                  <a:srgbClr val="0D1B2A"/>
+                </a:solidFill>
+                <a:latin typeface="Calibri" pitchFamily="34" charset="0"/>
+                <a:ea typeface="Calibri" pitchFamily="34" charset="-122"/>
+                <a:cs typeface="Calibri" pitchFamily="34" charset="-120"/>
+              </a:rPr>
+              <a:t>Porównaj</a:t>
+            </a:r>
+            <a:r>
+              <a:rPr lang="en-US" sz="1600" spc="-60" dirty="0" smtClean="0">
+                <a:solidFill>
+                  <a:srgbClr val="0D1B2A"/>
+                </a:solidFill>
+                <a:latin typeface="Calibri" pitchFamily="34" charset="0"/>
+                <a:ea typeface="Calibri" pitchFamily="34" charset="-122"/>
+                <a:cs typeface="Calibri" pitchFamily="34" charset="-120"/>
+              </a:rPr>
+              <a:t> </a:t>
+            </a:r>
+            <a:r>
+              <a:rPr lang="en-US" sz="1600" spc="-60" dirty="0">
+                <a:solidFill>
+                  <a:srgbClr val="0D1B2A"/>
+                </a:solidFill>
+                <a:latin typeface="Calibri" pitchFamily="34" charset="0"/>
+                <a:ea typeface="Calibri" pitchFamily="34" charset="-122"/>
+                <a:cs typeface="Calibri" pitchFamily="34" charset="-120"/>
+              </a:rPr>
+              <a:t>OpenVLA i klasyczny sterownik PID dla zadania "idź 2 m do przodu": </a:t>
+            </a:r>
+            <a:r>
+              <a:rPr lang="en-US" sz="1600" spc="-60" dirty="0" err="1" smtClean="0">
+                <a:solidFill>
+                  <a:srgbClr val="0D1B2A"/>
+                </a:solidFill>
+                <a:latin typeface="Calibri" pitchFamily="34" charset="0"/>
+                <a:ea typeface="Calibri" pitchFamily="34" charset="-122"/>
+                <a:cs typeface="Calibri" pitchFamily="34" charset="-120"/>
+              </a:rPr>
+              <a:t>jakie</a:t>
+            </a:r>
+            <a:r>
+              <a:rPr lang="en-US" sz="1600" spc="-60" dirty="0" smtClean="0">
+                <a:solidFill>
+                  <a:srgbClr val="0D1B2A"/>
+                </a:solidFill>
+                <a:latin typeface="Calibri" pitchFamily="34" charset="0"/>
+                <a:ea typeface="Calibri" pitchFamily="34" charset="-122"/>
+                <a:cs typeface="Calibri" pitchFamily="34" charset="-120"/>
+              </a:rPr>
+              <a:t> </a:t>
+            </a:r>
+            <a:r>
+              <a:rPr lang="en-US" sz="1600" spc="-60" dirty="0" err="1" smtClean="0">
+                <a:solidFill>
+                  <a:srgbClr val="0D1B2A"/>
+                </a:solidFill>
+                <a:latin typeface="Calibri" pitchFamily="34" charset="0"/>
+                <a:ea typeface="Calibri" pitchFamily="34" charset="-122"/>
+                <a:cs typeface="Calibri" pitchFamily="34" charset="-120"/>
+              </a:rPr>
+              <a:t>są</a:t>
+            </a:r>
+            <a:r>
+              <a:rPr lang="en-US" sz="1600" spc="-60" dirty="0" smtClean="0">
+                <a:solidFill>
+                  <a:srgbClr val="0D1B2A"/>
+                </a:solidFill>
+                <a:latin typeface="Calibri" pitchFamily="34" charset="0"/>
+                <a:ea typeface="Calibri" pitchFamily="34" charset="-122"/>
+                <a:cs typeface="Calibri" pitchFamily="34" charset="-120"/>
+              </a:rPr>
+              <a:t> </a:t>
+            </a:r>
+            <a:r>
+              <a:rPr lang="en-US" sz="1600" spc="-60" dirty="0">
+                <a:solidFill>
+                  <a:srgbClr val="0D1B2A"/>
+                </a:solidFill>
+                <a:latin typeface="Calibri" pitchFamily="34" charset="0"/>
+                <a:ea typeface="Calibri" pitchFamily="34" charset="-122"/>
+                <a:cs typeface="Calibri" pitchFamily="34" charset="-120"/>
+              </a:rPr>
+              <a:t>różnice w latencji, niezawodności i </a:t>
+            </a:r>
+            <a:r>
+              <a:rPr lang="en-US" sz="1600" spc="-60" dirty="0" err="1">
+                <a:solidFill>
+                  <a:srgbClr val="0D1B2A"/>
+                </a:solidFill>
+                <a:latin typeface="Calibri" pitchFamily="34" charset="0"/>
+                <a:ea typeface="Calibri" pitchFamily="34" charset="-122"/>
+                <a:cs typeface="Calibri" pitchFamily="34" charset="-120"/>
+              </a:rPr>
+              <a:t>możliwości</a:t>
+            </a:r>
+            <a:r>
+              <a:rPr lang="en-US" sz="1600" spc="-60" dirty="0">
+                <a:solidFill>
+                  <a:srgbClr val="0D1B2A"/>
+                </a:solidFill>
+                <a:latin typeface="Calibri" pitchFamily="34" charset="0"/>
+                <a:ea typeface="Calibri" pitchFamily="34" charset="-122"/>
+                <a:cs typeface="Calibri" pitchFamily="34" charset="-120"/>
+              </a:rPr>
+              <a:t> </a:t>
+            </a:r>
+            <a:r>
+              <a:rPr lang="en-US" sz="1600" spc="-60" dirty="0" err="1" smtClean="0">
+                <a:solidFill>
+                  <a:srgbClr val="0D1B2A"/>
+                </a:solidFill>
+                <a:latin typeface="Calibri" pitchFamily="34" charset="0"/>
+                <a:ea typeface="Calibri" pitchFamily="34" charset="-122"/>
+                <a:cs typeface="Calibri" pitchFamily="34" charset="-120"/>
+              </a:rPr>
+              <a:t>generalizacji</a:t>
+            </a:r>
+            <a:r>
+              <a:rPr lang="en-US" sz="1600" spc="-60" dirty="0" smtClean="0">
+                <a:solidFill>
+                  <a:srgbClr val="0D1B2A"/>
+                </a:solidFill>
+                <a:latin typeface="Calibri" pitchFamily="34" charset="0"/>
+                <a:ea typeface="Calibri" pitchFamily="34" charset="-122"/>
+                <a:cs typeface="Calibri" pitchFamily="34" charset="-120"/>
+              </a:rPr>
+              <a:t>?</a:t>
+            </a:r>
+            <a:endParaRPr lang="pl-PL" sz="1600" spc="-60" dirty="0"/>
+          </a:p>
+          <a:p>
+            <a:pPr algn="just">
               <a:spcAft>
                 <a:spcPts val="900"/>
               </a:spcAft>
               <a:buSzPct val="100000"/>
             </a:pPr>
             <a:r>
+              <a:rPr lang="en-US" sz="1600" b="1" spc="-60" dirty="0" smtClean="0">
+                <a:solidFill>
+                  <a:srgbClr val="0D1B2A"/>
+                </a:solidFill>
+                <a:latin typeface="Calibri" pitchFamily="34" charset="0"/>
+                <a:ea typeface="Calibri" pitchFamily="34" charset="-122"/>
+                <a:cs typeface="Calibri" pitchFamily="34" charset="-120"/>
+              </a:rPr>
+              <a:t>Bonus</a:t>
+            </a:r>
+            <a:r>
               <a:rPr lang="en-US" sz="1600" spc="-60" dirty="0">
                 <a:solidFill>
                   <a:srgbClr val="0D1B2A"/>
@@ -27273,136 +27808,8 @@
                 <a:ea typeface="Calibri" pitchFamily="34" charset="-122"/>
                 <a:cs typeface="Calibri" pitchFamily="34" charset="-120"/>
               </a:rPr>
-              <a:t>Porównaj OpenVLA i klasyczny sterownik PID dla zadania "idź 2 m do przodu": </a:t>
-            </a:r>
-            <a:r>
-              <a:rPr lang="pl-PL" sz="1600" spc="-60" dirty="0" smtClean="0">
-                <a:solidFill>
-                  <a:srgbClr val="0D1B2A"/>
-                </a:solidFill>
-                <a:latin typeface="Calibri" pitchFamily="34" charset="0"/>
-                <a:ea typeface="Calibri" pitchFamily="34" charset="-122"/>
-                <a:cs typeface="Calibri" pitchFamily="34" charset="-120"/>
-              </a:rPr>
-              <a:t/>
-            </a:r>
-            <a:br>
-              <a:rPr lang="pl-PL" sz="1600" spc="-60" dirty="0" smtClean="0">
-                <a:solidFill>
-                  <a:srgbClr val="0D1B2A"/>
-                </a:solidFill>
-                <a:latin typeface="Calibri" pitchFamily="34" charset="0"/>
-                <a:ea typeface="Calibri" pitchFamily="34" charset="-122"/>
-                <a:cs typeface="Calibri" pitchFamily="34" charset="-120"/>
-              </a:rPr>
-            </a:br>
-            <a:r>
-              <a:rPr lang="en-US" sz="1600" spc="-60" dirty="0" err="1" smtClean="0">
-                <a:solidFill>
-                  <a:srgbClr val="0D1B2A"/>
-                </a:solidFill>
-                <a:latin typeface="Calibri" pitchFamily="34" charset="0"/>
-                <a:ea typeface="Calibri" pitchFamily="34" charset="-122"/>
-                <a:cs typeface="Calibri" pitchFamily="34" charset="-120"/>
-              </a:rPr>
-              <a:t>jakie</a:t>
-            </a:r>
-            <a:r>
-              <a:rPr lang="en-US" sz="1600" spc="-60" dirty="0" smtClean="0">
-                <a:solidFill>
-                  <a:srgbClr val="0D1B2A"/>
-                </a:solidFill>
-                <a:latin typeface="Calibri" pitchFamily="34" charset="0"/>
-                <a:ea typeface="Calibri" pitchFamily="34" charset="-122"/>
-                <a:cs typeface="Calibri" pitchFamily="34" charset="-120"/>
-              </a:rPr>
-              <a:t> </a:t>
-            </a:r>
-            <a:r>
-              <a:rPr lang="en-US" sz="1600" spc="-60" dirty="0" err="1" smtClean="0">
-                <a:solidFill>
-                  <a:srgbClr val="0D1B2A"/>
-                </a:solidFill>
-                <a:latin typeface="Calibri" pitchFamily="34" charset="0"/>
-                <a:ea typeface="Calibri" pitchFamily="34" charset="-122"/>
-                <a:cs typeface="Calibri" pitchFamily="34" charset="-120"/>
-              </a:rPr>
-              <a:t>są</a:t>
-            </a:r>
-            <a:r>
-              <a:rPr lang="en-US" sz="1600" spc="-60" dirty="0" smtClean="0">
-                <a:solidFill>
-                  <a:srgbClr val="0D1B2A"/>
-                </a:solidFill>
-                <a:latin typeface="Calibri" pitchFamily="34" charset="0"/>
-                <a:ea typeface="Calibri" pitchFamily="34" charset="-122"/>
-                <a:cs typeface="Calibri" pitchFamily="34" charset="-120"/>
-              </a:rPr>
-              <a:t> </a:t>
-            </a:r>
-            <a:r>
-              <a:rPr lang="en-US" sz="1600" spc="-60" dirty="0">
-                <a:solidFill>
-                  <a:srgbClr val="0D1B2A"/>
-                </a:solidFill>
-                <a:latin typeface="Calibri" pitchFamily="34" charset="0"/>
-                <a:ea typeface="Calibri" pitchFamily="34" charset="-122"/>
-                <a:cs typeface="Calibri" pitchFamily="34" charset="-120"/>
-              </a:rPr>
-              <a:t>różnice w latencji, niezawodności i możliwości generalizacji?</a:t>
-            </a:r>
-            <a:endParaRPr lang="en-US" sz="1600" spc="-60" dirty="0"/>
-          </a:p>
-          <a:p>
-            <a:pPr lvl="1">
-              <a:spcAft>
-                <a:spcPts val="900"/>
-              </a:spcAft>
-              <a:buSzPct val="100000"/>
-            </a:pPr>
-            <a:r>
-              <a:rPr lang="en-US" sz="1600" b="1" spc="-60" dirty="0">
-                <a:solidFill>
-                  <a:srgbClr val="0D1B2A"/>
-                </a:solidFill>
-                <a:latin typeface="Calibri" pitchFamily="34" charset="0"/>
-                <a:ea typeface="Calibri" pitchFamily="34" charset="-122"/>
-                <a:cs typeface="Calibri" pitchFamily="34" charset="-120"/>
-              </a:rPr>
-              <a:t>Bonus</a:t>
-            </a:r>
-            <a:r>
-              <a:rPr lang="en-US" sz="1600" spc="-60" dirty="0">
-                <a:solidFill>
-                  <a:srgbClr val="0D1B2A"/>
-                </a:solidFill>
-                <a:latin typeface="Calibri" pitchFamily="34" charset="0"/>
-                <a:ea typeface="Calibri" pitchFamily="34" charset="-122"/>
-                <a:cs typeface="Calibri" pitchFamily="34" charset="-120"/>
-              </a:rPr>
               <a:t>: skonfiguruj pipeline LLaVA-1.6 (3B) + Nav2 w symulatorze Gazebo </a:t>
             </a:r>
-            <a:r>
-              <a:rPr lang="pl-PL" sz="1600" spc="-60" dirty="0" smtClean="0">
-                <a:solidFill>
-                  <a:srgbClr val="0D1B2A"/>
-                </a:solidFill>
-                <a:latin typeface="Calibri" pitchFamily="34" charset="0"/>
-                <a:ea typeface="Calibri" pitchFamily="34" charset="-122"/>
-                <a:cs typeface="Calibri" pitchFamily="34" charset="-120"/>
-              </a:rPr>
-              <a:t/>
-            </a:r>
-            <a:br>
-              <a:rPr lang="pl-PL" sz="1600" spc="-60" dirty="0" smtClean="0">
-                <a:solidFill>
-                  <a:srgbClr val="0D1B2A"/>
-                </a:solidFill>
-                <a:latin typeface="Calibri" pitchFamily="34" charset="0"/>
-                <a:ea typeface="Calibri" pitchFamily="34" charset="-122"/>
-                <a:cs typeface="Calibri" pitchFamily="34" charset="-120"/>
-              </a:rPr>
-            </a:br>
             <a:r>
               <a:rPr lang="en-US" sz="1600" spc="-60" dirty="0" err="1" smtClean="0">
                 <a:solidFill>
@@ -28081,7 +28488,7 @@
               <a:buNone/>
             </a:pPr>
             <a:r>
-              <a:rPr lang="en-US" sz="2400" b="1" dirty="0">
+              <a:rPr lang="en-US" sz="2400" b="1" dirty="0" err="1">
                 <a:solidFill>
                   <a:srgbClr val="FFFFFF"/>
                 </a:solidFill>
@@ -28089,10 +28496,10 @@
                 <a:ea typeface="Trebuchet MS" pitchFamily="34" charset="-122"/>
                 <a:cs typeface="Trebuchet MS" pitchFamily="34" charset="-120"/>
               </a:rPr>
-              <a:t>Architektura VLM </a:t>
-            </a:r>
-            <a:r>
-              <a:rPr lang="en-US" sz="2400" b="1" dirty="0" smtClean="0">
+              <a:t>Architektura</a:t>
+            </a:r>
+            <a:r>
+              <a:rPr lang="en-US" sz="2400" b="1" dirty="0">
                 <a:solidFill>
                   <a:srgbClr val="FFFFFF"/>
                 </a:solidFill>
@@ -28100,10 +28507,10 @@
                 <a:ea typeface="Trebuchet MS" pitchFamily="34" charset="-122"/>
                 <a:cs typeface="Trebuchet MS" pitchFamily="34" charset="-120"/>
               </a:rPr>
-              <a:t>- </a:t>
-            </a:r>
-            <a:r>
-              <a:rPr lang="en-US" sz="2400" b="1" dirty="0">
+              <a:t> </a:t>
+            </a:r>
+            <a:r>
+              <a:rPr lang="en-US" sz="2400" b="1" dirty="0" smtClean="0">
                 <a:solidFill>
                   <a:srgbClr val="FFFFFF"/>
                 </a:solidFill>
@@ -28111,7 +28518,40 @@
                 <a:ea typeface="Trebuchet MS" pitchFamily="34" charset="-122"/>
                 <a:cs typeface="Trebuchet MS" pitchFamily="34" charset="-120"/>
               </a:rPr>
-              <a:t>od pikseli do tokenów</a:t>
+              <a:t>VLM</a:t>
+            </a:r>
+            <a:r>
+              <a:rPr lang="pl-PL" sz="2400" b="1" dirty="0" smtClean="0">
+                <a:solidFill>
+                  <a:srgbClr val="FFFFFF"/>
+                </a:solidFill>
+                <a:latin typeface="Trebuchet MS" pitchFamily="34" charset="0"/>
+                <a:ea typeface="Trebuchet MS" pitchFamily="34" charset="-122"/>
+                <a:cs typeface="Trebuchet MS" pitchFamily="34" charset="-120"/>
+              </a:rPr>
+              <a:t>: </a:t>
+            </a:r>
+            <a:r>
+              <a:rPr lang="en-US" sz="2400" b="1" dirty="0" smtClean="0">
+                <a:solidFill>
+                  <a:srgbClr val="FFFFFF"/>
+                </a:solidFill>
+                <a:latin typeface="Trebuchet MS" pitchFamily="34" charset="0"/>
+                <a:ea typeface="Trebuchet MS" pitchFamily="34" charset="-122"/>
+                <a:cs typeface="Trebuchet MS" pitchFamily="34" charset="-120"/>
+              </a:rPr>
+              <a:t>od </a:t>
+            </a:r>
+            <a:r>
+              <a:rPr lang="en-US" sz="2400" b="1" dirty="0">
+                <a:solidFill>
+                  <a:srgbClr val="FFFFFF"/>
+                </a:solidFill>
+                <a:latin typeface="Trebuchet MS" pitchFamily="34" charset="0"/>
+                <a:ea typeface="Trebuchet MS" pitchFamily="34" charset="-122"/>
+                <a:cs typeface="Trebuchet MS" pitchFamily="34" charset="-120"/>
+              </a:rPr>
+              <a:t>pikseli do tokenów</a:t>
             </a:r>
             <a:endParaRPr lang="en-US" sz="2400" dirty="0"/>
           </a:p>
@@ -29387,7 +29827,7 @@
               <a:buNone/>
             </a:pPr>
             <a:r>
-              <a:rPr lang="en-US" sz="2400" b="1" dirty="0">
+              <a:rPr lang="en-US" sz="2400" b="1" dirty="0" smtClean="0">
                 <a:solidFill>
                   <a:srgbClr val="FFFFFF"/>
                 </a:solidFill>
@@ -29395,10 +29835,10 @@
                 <a:ea typeface="Trebuchet MS" pitchFamily="34" charset="-122"/>
                 <a:cs typeface="Trebuchet MS" pitchFamily="34" charset="-120"/>
               </a:rPr>
-              <a:t>CLIP </a:t>
-            </a:r>
-            <a:r>
-              <a:rPr lang="en-US" sz="2400" b="1" dirty="0" smtClean="0">
+              <a:t>CLIP</a:t>
+            </a:r>
+            <a:r>
+              <a:rPr lang="pl-PL" sz="2400" b="1" dirty="0" smtClean="0">
                 <a:solidFill>
                   <a:srgbClr val="FFFFFF"/>
                 </a:solidFill>
@@ -29406,7 +29846,18 @@
                 <a:ea typeface="Trebuchet MS" pitchFamily="34" charset="-122"/>
                 <a:cs typeface="Trebuchet MS" pitchFamily="34" charset="-120"/>
               </a:rPr>
-              <a:t>- </a:t>
+              <a:t>:</a:t>
+            </a:r>
+            <a:r>
+              <a:rPr lang="en-US" sz="2400" b="1" dirty="0" smtClean="0">
+                <a:solidFill>
+                  <a:srgbClr val="FFFFFF"/>
+                </a:solidFill>
+                <a:latin typeface="Trebuchet MS" pitchFamily="34" charset="0"/>
+                <a:ea typeface="Trebuchet MS" pitchFamily="34" charset="-122"/>
+                <a:cs typeface="Trebuchet MS" pitchFamily="34" charset="-120"/>
+              </a:rPr>
+              <a:t> </a:t>
             </a:r>
             <a:r>
               <a:rPr lang="en-US" sz="2400" b="1" dirty="0">
@@ -31032,7 +31483,7 @@
               <a:t>Grounding </a:t>
             </a:r>
             <a:r>
-              <a:rPr lang="en-US" sz="2400" b="1" dirty="0" err="1">
+              <a:rPr lang="en-US" sz="2400" b="1" dirty="0" err="1" smtClean="0">
                 <a:solidFill>
                   <a:srgbClr val="FFFFFF"/>
                 </a:solidFill>
@@ -31043,7 +31494,7 @@
               <a:t>semantyczny</a:t>
             </a:r>
             <a:r>
-              <a:rPr lang="en-US" sz="2400" b="1" dirty="0">
+              <a:rPr lang="pl-PL" sz="2400" b="1" dirty="0">
                 <a:solidFill>
                   <a:srgbClr val="FFFFFF"/>
                 </a:solidFill>
@@ -31051,7 +31502,7 @@
                 <a:ea typeface="Trebuchet MS" pitchFamily="34" charset="-122"/>
                 <a:cs typeface="Trebuchet MS" pitchFamily="34" charset="-120"/>
               </a:rPr>
-              <a:t> </a:t>
+              <a:t>:</a:t>
             </a:r>
             <a:r>
               <a:rPr lang="en-US" sz="2400" b="1" dirty="0" smtClean="0">
@@ -31062,7 +31513,7 @@
                 <a:ea typeface="Trebuchet MS" pitchFamily="34" charset="-122"/>
                 <a:cs typeface="Trebuchet MS" pitchFamily="34" charset="-120"/>
               </a:rPr>
-              <a:t>- </a:t>
+              <a:t> </a:t>
             </a:r>
             <a:r>
               <a:rPr lang="en-US" sz="2400" b="1" dirty="0">
